--- a/it/slides/05-Architettura_dei_Calcolatori-Rappresentazione_dei_Numeri_Interi-Lab.pptx
+++ b/it/slides/05-Architettura_dei_Calcolatori-Rappresentazione_dei_Numeri_Interi-Lab.pptx
@@ -126,28 +126,28 @@
   <p:extLst>
     <p:ext uri="{521415D9-36F7-43E2-AB2F-B90AF26B5E84}">
       <p14:sectionLst xmlns:p14="http://schemas.microsoft.com/office/powerpoint/2010/main">
-        <p14:section name="Apertura" id="{8fbb5781-f9b5-fe33-d6f0-a335cee005ed}">
+        <p14:section name="Apertura" id="{0e623a8f-4784-73a9-26a0-5f6163de56bb}">
           <p14:sldIdLst>
             <p14:sldId id="256"/>
             <p14:sldId id="257"/>
           </p14:sldIdLst>
         </p14:section>
-        <p14:section name="Riscaldamento sulla macchina" id="{a8567031-3f22-63d5-d00a-75eda8fd0be6}">
+        <p14:section name="Riscaldamento sulla macchina" id="{4dd915b9-93df-e377-9118-3cdfaf683ac4}">
           <p14:sldIdLst>
             <p14:sldId id="258"/>
           </p14:sldIdLst>
         </p14:section>
-        <p14:section name="Numeri naturali e overflow" id="{6164f887-46ed-1eff-1215-35f6affd6c50}">
+        <p14:section name="Numeri naturali e overflow" id="{1bf0fc2e-598b-85c7-64ad-3b7c04cb9cd8}">
           <p14:sldIdLst>
             <p14:sldId id="259"/>
           </p14:sldIdLst>
         </p14:section>
-        <p14:section name="Interi con segno" id="{9263cace-ee2c-9ec2-38a9-3b39db829173}">
+        <p14:section name="Interi con segno" id="{52f0cbd2-580e-1b9b-2817-765d79864ae7}">
           <p14:sldIdLst>
             <p14:sldId id="260"/>
           </p14:sldIdLst>
         </p14:section>
-        <p14:section name="Ritorno alla macchina" id="{70a4f5f9-d659-07c5-0b25-a186565076f5}">
+        <p14:section name="Ritorno alla macchina" id="{e4a16215-f3ce-5e53-74c9-af5653192f78}">
           <p14:sldIdLst>
             <p14:sldId id="261"/>
             <p14:sldId id="262"/>
@@ -155,7 +155,7 @@
             <p14:sldId id="264"/>
           </p14:sldIdLst>
         </p14:section>
-        <p14:section name="Il programma completo" id="{9b8c0a09-98bc-d657-77f3-19fc9b653361}">
+        <p14:section name="Il programma completo" id="{b297d1db-e1e7-9657-19a5-3cf5aee01f28}">
           <p14:sldIdLst>
             <p14:sldId id="265"/>
             <p14:sldId id="266"/>
@@ -164,7 +164,7 @@
             <p14:sldId id="269"/>
           </p14:sldIdLst>
         </p14:section>
-        <p14:section name="Eseguire e provare" id="{3bd12f71-29b4-d9ef-4b6e-4f968e4f33c3}">
+        <p14:section name="Eseguire e provare" id="{21fd449c-b7c2-c76a-a449-607eb6c110ae}">
           <p14:sldIdLst>
             <p14:sldId id="270"/>
             <p14:sldId id="271"/>
@@ -173,7 +173,7 @@
             <p14:sldId id="274"/>
           </p14:sldIdLst>
         </p14:section>
-        <p14:section name="Esercizi" id="{be439790-413d-d1c5-e8de-6a56c8df5701}">
+        <p14:section name="Esercizi" id="{ee8eaece-17e0-d150-3045-ab0c8b24846c}">
           <p14:sldIdLst>
             <p14:sldId id="275"/>
           </p14:sldIdLst>

--- a/it/slides/05-Architettura_dei_Calcolatori-Rappresentazione_dei_Numeri_Interi-Lab.pptx
+++ b/it/slides/05-Architettura_dei_Calcolatori-Rappresentazione_dei_Numeri_Interi-Lab.pptx
@@ -126,28 +126,28 @@
   <p:extLst>
     <p:ext uri="{521415D9-36F7-43E2-AB2F-B90AF26B5E84}">
       <p14:sectionLst xmlns:p14="http://schemas.microsoft.com/office/powerpoint/2010/main">
-        <p14:section name="Apertura" id="{0e623a8f-4784-73a9-26a0-5f6163de56bb}">
+        <p14:section name="Apertura" id="{2df87ccf-9dad-3d0e-38ea-e50876986a76}">
           <p14:sldIdLst>
             <p14:sldId id="256"/>
             <p14:sldId id="257"/>
           </p14:sldIdLst>
         </p14:section>
-        <p14:section name="Riscaldamento sulla macchina" id="{4dd915b9-93df-e377-9118-3cdfaf683ac4}">
+        <p14:section name="Riscaldamento sulla macchina" id="{5bd0508a-02bb-0a9b-dd30-31d9a78f2e21}">
           <p14:sldIdLst>
             <p14:sldId id="258"/>
           </p14:sldIdLst>
         </p14:section>
-        <p14:section name="Numeri naturali e overflow" id="{1bf0fc2e-598b-85c7-64ad-3b7c04cb9cd8}">
+        <p14:section name="Numeri naturali e overflow" id="{be235d12-1f88-182d-dc00-0b2216d085d7}">
           <p14:sldIdLst>
             <p14:sldId id="259"/>
           </p14:sldIdLst>
         </p14:section>
-        <p14:section name="Interi con segno" id="{52f0cbd2-580e-1b9b-2817-765d79864ae7}">
+        <p14:section name="Interi con segno" id="{f2c5477e-0029-2007-bdf7-20be35133b0f}">
           <p14:sldIdLst>
             <p14:sldId id="260"/>
           </p14:sldIdLst>
         </p14:section>
-        <p14:section name="Ritorno alla macchina" id="{e4a16215-f3ce-5e53-74c9-af5653192f78}">
+        <p14:section name="Ritorno alla macchina" id="{72c6e2ec-20f0-68d9-4565-308236e65e79}">
           <p14:sldIdLst>
             <p14:sldId id="261"/>
             <p14:sldId id="262"/>
@@ -155,7 +155,7 @@
             <p14:sldId id="264"/>
           </p14:sldIdLst>
         </p14:section>
-        <p14:section name="Il programma completo" id="{b297d1db-e1e7-9657-19a5-3cf5aee01f28}">
+        <p14:section name="Il programma completo" id="{3684b7b6-2855-da4f-6b23-07ad884ea7f4}">
           <p14:sldIdLst>
             <p14:sldId id="265"/>
             <p14:sldId id="266"/>
@@ -164,7 +164,7 @@
             <p14:sldId id="269"/>
           </p14:sldIdLst>
         </p14:section>
-        <p14:section name="Eseguire e provare" id="{21fd449c-b7c2-c76a-a449-607eb6c110ae}">
+        <p14:section name="Eseguire e provare" id="{c380aefa-ef8d-d4f9-d7ed-d6ebe41fd046}">
           <p14:sldIdLst>
             <p14:sldId id="270"/>
             <p14:sldId id="271"/>
@@ -173,7 +173,7 @@
             <p14:sldId id="274"/>
           </p14:sldIdLst>
         </p14:section>
-        <p14:section name="Esercizi" id="{ee8eaece-17e0-d150-3045-ab0c8b24846c}">
+        <p14:section name="Esercizi" id="{28f94bad-b02f-6b58-1a67-15fbc256c40e}">
           <p14:sldIdLst>
             <p14:sldId id="275"/>
           </p14:sldIdLst>
@@ -584,7 +584,8 @@
               <a:rPr lang="en-US" dirty="0"/>
               <a:t>Questa è la presentazione del codice della Lezione 05. Mentre la presentazione della lezione sviluppa i concetti, questa raccoglie tutto ciò che si scrive e si esegue: ogni listato con il suo commento, il programma completo della lezione, il risultato che deve produrre, e la procedura per provarlo su ciascuno dei tre host. Le due presentazioni vanno lette insieme: i concetti spiegano il codice, e il codice dà ai concetti una conseguenza osservabile.
 Stato di apprendimento: DA COMPRENDERE OGGI, alla fine di questa lezione lo spiegate, lo seguite passo passo e lo applicate da soli; DA UTILIZZARE OGGI, oggi seguite e usate la ricetta; come funziona dentro si spiega più avanti, o non fa parte del corso; DA COMPRENDERE PIÙ AVANTI, riconoscete il nome e lo scopo; lo spiega una lezione successiva. Una slide senza etichetta è contesto: una storia, un esempio, una domanda, un esercizio.
-Stato di apprendimento di questa lezione. DA COMPRENDERE OGGI: il complemento a due; i cambi di base; naturali e overflow; shift come moltiplicazione; segno e modulo; istruzioni con o senza segno; l'estensione del segno. DA UTILIZZARE OGGI: le chiamate del runtime PRG32, il programma completo, gli strumenti di PRG32 (si usa, non si studia, in questo corso). DA COMPRENDERE PIÙ AVANTI: niente. Una slide senza etichetta è contesto: una storia, un esempio, una domanda, un esercizio.</a:t>
+Stato di apprendimento di questa lezione. DA COMPRENDERE OGGI: il complemento a due; i cambi di base; naturali e overflow; shift come moltiplicazione; segno e modulo; istruzioni con o senza segno; l'estensione del segno. DA UTILIZZARE OGGI: le chiamate del runtime PRG32, il programma completo, gli strumenti di PRG32 (si usa, non si studia, in questo corso). DA COMPRENDERE PIÙ AVANTI: niente. Una slide senza etichetta è contesto: una storia, un esempio, una domanda, un esercizio.
+Percorso. I risultati di oggi: (1) convertire tra basi e leggere una configurazione di n bit come naturale e in complemento a due; (2) riconoscere il trabocco nella somma di naturali e di interi; (3) scegliere tra istruzioni con e senza segno, comprese lb e lbu. Si appoggia su: solo ciò che ha preparato la Lezione 01. Prossimo passo: Lezione 06, Rappresentazione dei numeri: i reali.</a:t>
             </a:r>
             <a:endParaRPr lang="en-US" dirty="0"/>
           </a:p>
